--- a/DBTUNING/ch27_V뷰인스턴스튜닝2_대기이벤트/ch27_V뷰_대기이벤트분석.pptx
+++ b/DBTUNING/ch27_V뷰인스턴스튜닝2_대기이벤트/ch27_V뷰_대기이벤트분석.pptx
@@ -1238,7 +1238,7 @@
           <a:lstStyle/>
           <a:p>
             <a:r>
-              <a:t>enqueue는 latch mutex와 달리 데이터베이스 자원에 대한 더 오래 지속되는 논리적 잠금이다. 가장 흔한 것이 TX 트랜잭션 잠금이고 enq TX row lock contention으로 나타난다. Application 클래스라는 사실이 성격을 말한다. 디스크나 메모리가 아니라 애플리케이션의 잠금 설계 문제다. 행 잠금은 읽기를 막지 않으므로 이 대기는 쓰기 대 쓰기에서만 생긴다. 3장에서 블로킹 세션 597이 596을 막은 관점으로 다뤘다면, 여기서는 같은 현상을 이 대기 이벤트가 어느 세그먼트 어느 SQL에서 발생했는가로 다시 본다.</a:t>
+              <a:t>enqueue는 latch mutex와 달리 데이터베이스 자원에 대한 더 오래 지속되는 논리적 잠금이다. 가장 흔한 것이 TX 트랜잭션 잠금이고 enq TX row lock contention으로 나타난다. Application 클래스라는 사실이 성격을 말한다. 디스크나 메모리가 아니라 애플리케이션의 잠금 설계 문제다. 행 잠금은 읽기를 막지 않으므로 이 대기는 쓰기 대 쓰기에서만 생긴다. ch17에서 블로킹 세션 597이 596을 막은 관점으로 다뤘다면, 여기서는 같은 현상을 이 대기 이벤트가 어느 세그먼트 어느 SQL에서 발생했는가로 다시 본다.</a:t>
             </a:r>
           </a:p>
         </p:txBody>
@@ -5441,7 +5441,7 @@
                 </a:solidFill>
                 <a:latin typeface="맑은 고딕"/>
               </a:rPr>
-              <a:t>제14장</a:t>
+              <a:t>제ch27</a:t>
             </a:r>
           </a:p>
         </p:txBody>
@@ -11439,7 +11439,7 @@
                 </a:solidFill>
                 <a:latin typeface="맑은 고딕"/>
               </a:rPr>
-              <a:t>발생 원리와 3장과의 관계</a:t>
+              <a:t>발생 원리와 ch17과의 관계</a:t>
             </a:r>
           </a:p>
         </p:txBody>
@@ -11545,7 +11545,7 @@
                 </a:solidFill>
                 <a:latin typeface="맑은 고딕"/>
               </a:rPr>
-              <a:t>•  3장: '누가 누구를 막았나'(블로킹 597↔596)</a:t>
+              <a:t>•  ch17: '누가 누구를 막았나'(블로킹 597↔596)</a:t>
             </a:r>
           </a:p>
           <a:p>
@@ -11561,7 +11561,7 @@
                 </a:solidFill>
                 <a:latin typeface="맑은 고딕"/>
               </a:rPr>
-              <a:t>•  14장: '이 대기가 어느 세그먼트·SQL에서'</a:t>
+              <a:t>•  ch27: '이 대기가 어느 세그먼트·SQL에서'</a:t>
             </a:r>
           </a:p>
         </p:txBody>

--- a/DBTUNING/ch27_V뷰인스턴스튜닝2_대기이벤트/ch27_V뷰_대기이벤트분석.pptx
+++ b/DBTUNING/ch27_V뷰인스턴스튜닝2_대기이벤트/ch27_V뷰_대기이벤트분석.pptx
@@ -5441,7 +5441,7 @@
                 </a:solidFill>
                 <a:latin typeface="맑은 고딕"/>
               </a:rPr>
-              <a:t>제ch27</a:t>
+              <a:t>ch27</a:t>
             </a:r>
           </a:p>
         </p:txBody>

--- a/DBTUNING/ch27_V뷰인스턴스튜닝2_대기이벤트/ch27_V뷰_대기이벤트분석.pptx
+++ b/DBTUNING/ch27_V뷰인스턴스튜닝2_대기이벤트/ch27_V뷰_대기이벤트분석.pptx
@@ -6490,7 +6490,7 @@
                 </a:solidFill>
                 <a:latin typeface="맑은 고딕"/>
               </a:rPr>
-              <a:t>14.4</a:t>
+              <a:t>27.4</a:t>
             </a:r>
           </a:p>
         </p:txBody>
@@ -8169,7 +8169,7 @@
                 </a:solidFill>
                 <a:latin typeface="맑은 고딕"/>
               </a:rPr>
-              <a:t>14.5</a:t>
+              <a:t>27.5</a:t>
             </a:r>
           </a:p>
         </p:txBody>
@@ -9917,7 +9917,7 @@
                 </a:solidFill>
                 <a:latin typeface="맑은 고딕"/>
               </a:rPr>
-              <a:t>14.6</a:t>
+              <a:t>27.6</a:t>
             </a:r>
           </a:p>
         </p:txBody>
@@ -11132,7 +11132,7 @@
                 </a:solidFill>
                 <a:latin typeface="맑은 고딕"/>
               </a:rPr>
-              <a:t>14.7</a:t>
+              <a:t>27.7</a:t>
             </a:r>
           </a:p>
         </p:txBody>
@@ -12142,7 +12142,7 @@
                 </a:solidFill>
                 <a:latin typeface="맑은 고딕"/>
               </a:rPr>
-              <a:t>•  14.2  대기 이벤트 분류 체계 — V$EVENT_NAME과 대기 클래스</a:t>
+              <a:t>•  27.2  대기 이벤트 분류 체계 — V$EVENT_NAME과 대기 클래스</a:t>
             </a:r>
           </a:p>
           <a:p>
@@ -12158,7 +12158,7 @@
                 </a:solidFill>
                 <a:latin typeface="맑은 고딕"/>
               </a:rPr>
-              <a:t>•  14.3  db file sequential read와 scattered read</a:t>
+              <a:t>•  27.3  db file sequential read와 scattered read</a:t>
             </a:r>
           </a:p>
           <a:p>
@@ -12174,7 +12174,7 @@
                 </a:solidFill>
                 <a:latin typeface="맑은 고딕"/>
               </a:rPr>
-              <a:t>•  14.4  buffer busy waits — 원인 세그먼트를 지목하라</a:t>
+              <a:t>•  27.4  buffer busy waits — 원인 세그먼트를 지목하라</a:t>
             </a:r>
           </a:p>
           <a:p>
@@ -12190,7 +12190,7 @@
                 </a:solidFill>
                 <a:latin typeface="맑은 고딕"/>
               </a:rPr>
-              <a:t>•  14.5  log file sync — 커밋 빈도가 만드는 대기</a:t>
+              <a:t>•  27.5  log file sync — 커밋 빈도가 만드는 대기</a:t>
             </a:r>
           </a:p>
           <a:p>
@@ -12206,7 +12206,7 @@
                 </a:solidFill>
                 <a:latin typeface="맑은 고딕"/>
               </a:rPr>
-              <a:t>•  14.6  latch와 mutex 경합 — 라이브러리 캐시의 자물쇠</a:t>
+              <a:t>•  27.6  latch와 mutex 경합 — 라이브러리 캐시의 자물쇠</a:t>
             </a:r>
           </a:p>
           <a:p>
@@ -12222,7 +12222,7 @@
                 </a:solidFill>
                 <a:latin typeface="맑은 고딕"/>
               </a:rPr>
-              <a:t>•  14.7  enqueue 대기 — enq: TX - row lock contention</a:t>
+              <a:t>•  27.7  enqueue 대기 — enq: TX - row lock contention</a:t>
             </a:r>
           </a:p>
           <a:p>
@@ -12238,7 +12238,7 @@
                 </a:solidFill>
                 <a:latin typeface="맑은 고딕"/>
               </a:rPr>
-              <a:t>•  14.8  Idle 이벤트를 병목으로 오판하지 않기</a:t>
+              <a:t>•  27.8  Idle 이벤트를 병목으로 오판하지 않기</a:t>
             </a:r>
           </a:p>
         </p:txBody>
@@ -12598,7 +12598,7 @@
                 </a:solidFill>
                 <a:latin typeface="맑은 고딕"/>
               </a:rPr>
-              <a:t>14.8</a:t>
+              <a:t>27.8</a:t>
             </a:r>
           </a:p>
         </p:txBody>
@@ -14531,7 +14531,7 @@
                 </a:solidFill>
                 <a:latin typeface="맑은 고딕"/>
               </a:rPr>
-              <a:t>14.2</a:t>
+              <a:t>27.2</a:t>
             </a:r>
           </a:p>
         </p:txBody>
@@ -16044,7 +16044,7 @@
                 </a:solidFill>
                 <a:latin typeface="맑은 고딕"/>
               </a:rPr>
-              <a:t>14.3</a:t>
+              <a:t>27.3</a:t>
             </a:r>
           </a:p>
         </p:txBody>
